--- a/courses/learn_floorplanning/module01-01-fixed-outline/slides.pptx
+++ b/courses/learn_floorplanning/module01-01-fixed-outline/slides.pptx
@@ -15,6 +15,9 @@
     <p:sldId id="263" r:id="rId15"/>
     <p:sldId id="264" r:id="rId16"/>
     <p:sldId id="265" r:id="rId17"/>
+    <p:sldId id="266" r:id="rId18"/>
+    <p:sldId id="267" r:id="rId19"/>
+    <p:sldId id="268" r:id="rId20"/>
   </p:sldIdLst>
   <p:sldSz cx="12191695" cy="6858000" type="screen4x3"/>
   <p:notesSz cx="6858000" cy="9144000"/>
@@ -514,12 +517,6 @@
               <a:t>Floorplanning on this course uses a fixed outline ten by eight. Modules A through E must pack inside—no growing the chip. In this lab you’ll reject illegal packings before you ever talk about density.</a:t>
             </a:r>
           </a:p>
-          <a:p/>
-          <a:p>
-            <a:r>
-              <a:t>&lt;!-- algorithm-walkthrough --&gt;</a:t>
-            </a:r>
-          </a:p>
         </p:txBody>
       </p:sp>
       <p:sp>
@@ -587,6 +584,146 @@
           <a:lstStyle/>
           <a:p>
             <a:r>
+              <a:t>Parse tiny_modules.json, assign (x, y), and implement containment plus pairwise non-overlap. On the golden packing, legality must pass; on the bad seed with E at nine, it must fail with E outside the outline.</a:t>
+            </a:r>
+          </a:p>
+        </p:txBody>
+      </p:sp>
+      <p:sp>
+        <p:nvSpPr>
+          <p:cNvPr id="4" name="Slide Number Placeholder 3"/>
+          <p:cNvSpPr>
+            <a:spLocks noGrp="1"/>
+          </p:cNvSpPr>
+          <p:nvPr>
+            <p:ph type="sldNum" idx="5" sz="quarter"/>
+          </p:nvPr>
+        </p:nvSpPr>
+        <p:spPr/>
+      </p:sp>
+    </p:spTree>
+  </p:cSld>
+  <p:clrMapOvr>
+    <a:masterClrMapping/>
+  </p:clrMapOvr>
+</p:notes>
+</file>
+
+<file path=ppt/notesSlides/notesSlide11.xml><?xml version="1.0" encoding="utf-8"?>
+<p:notes xmlns:a="http://schemas.openxmlformats.org/drawingml/2006/main" xmlns:p="http://schemas.openxmlformats.org/presentationml/2006/main" xmlns:r="http://schemas.openxmlformats.org/officeDocument/2006/relationships">
+  <p:cSld>
+    <p:spTree>
+      <p:nvGrpSpPr>
+        <p:cNvPr id="1" name=""/>
+        <p:cNvGrpSpPr/>
+        <p:nvPr/>
+      </p:nvGrpSpPr>
+      <p:grpSpPr>
+        <a:xfrm>
+          <a:off x="0" y="0"/>
+          <a:ext cx="0" cy="0"/>
+          <a:chOff x="0" y="0"/>
+          <a:chExt cx="0" cy="0"/>
+        </a:xfrm>
+      </p:grpSpPr>
+      <p:sp>
+        <p:nvSpPr>
+          <p:cNvPr id="2" name="Slide Image Placeholder 1"/>
+          <p:cNvSpPr>
+            <a:spLocks noGrp="1"/>
+          </p:cNvSpPr>
+          <p:nvPr>
+            <p:ph type="sldImg" idx="2"/>
+          </p:nvPr>
+        </p:nvSpPr>
+        <p:spPr/>
+      </p:sp>
+      <p:sp>
+        <p:nvSpPr>
+          <p:cNvPr id="3" name="Notes Placeholder 2"/>
+          <p:cNvSpPr>
+            <a:spLocks noGrp="1"/>
+          </p:cNvSpPr>
+          <p:nvPr>
+            <p:ph type="body" idx="3" sz="quarter"/>
+          </p:nvPr>
+        </p:nvSpPr>
+        <p:spPr/>
+        <p:txBody>
+          <a:bodyPr/>
+          <a:lstStyle/>
+          <a:p>
+            <a:r>
+              <a:t>Off-by-one edges, treating centers as rectangles, and celebrating density on illegal layouts. Edge-touching is allowed; interior overlap is not.</a:t>
+            </a:r>
+          </a:p>
+        </p:txBody>
+      </p:sp>
+      <p:sp>
+        <p:nvSpPr>
+          <p:cNvPr id="4" name="Slide Number Placeholder 3"/>
+          <p:cNvSpPr>
+            <a:spLocks noGrp="1"/>
+          </p:cNvSpPr>
+          <p:nvPr>
+            <p:ph type="sldNum" idx="5" sz="quarter"/>
+          </p:nvPr>
+        </p:nvSpPr>
+        <p:spPr/>
+      </p:sp>
+    </p:spTree>
+  </p:cSld>
+  <p:clrMapOvr>
+    <a:masterClrMapping/>
+  </p:clrMapOvr>
+</p:notes>
+</file>
+
+<file path=ppt/notesSlides/notesSlide12.xml><?xml version="1.0" encoding="utf-8"?>
+<p:notes xmlns:a="http://schemas.openxmlformats.org/drawingml/2006/main" xmlns:p="http://schemas.openxmlformats.org/presentationml/2006/main" xmlns:r="http://schemas.openxmlformats.org/officeDocument/2006/relationships">
+  <p:cSld>
+    <p:spTree>
+      <p:nvGrpSpPr>
+        <p:cNvPr id="1" name=""/>
+        <p:cNvGrpSpPr/>
+        <p:nvPr/>
+      </p:nvGrpSpPr>
+      <p:grpSpPr>
+        <a:xfrm>
+          <a:off x="0" y="0"/>
+          <a:ext cx="0" cy="0"/>
+          <a:chOff x="0" y="0"/>
+          <a:chExt cx="0" cy="0"/>
+        </a:xfrm>
+      </p:grpSpPr>
+      <p:sp>
+        <p:nvSpPr>
+          <p:cNvPr id="2" name="Slide Image Placeholder 1"/>
+          <p:cNvSpPr>
+            <a:spLocks noGrp="1"/>
+          </p:cNvSpPr>
+          <p:nvPr>
+            <p:ph type="sldImg" idx="2"/>
+          </p:nvPr>
+        </p:nvSpPr>
+        <p:spPr/>
+      </p:sp>
+      <p:sp>
+        <p:nvSpPr>
+          <p:cNvPr id="3" name="Notes Placeholder 2"/>
+          <p:cNvSpPr>
+            <a:spLocks noGrp="1"/>
+          </p:cNvSpPr>
+          <p:nvPr>
+            <p:ph type="body" idx="3" sz="quarter"/>
+          </p:nvPr>
+        </p:nvSpPr>
+        <p:spPr/>
+        <p:txBody>
+          <a:bodyPr/>
+          <a:lstStyle/>
+          <a:p>
+            <a:r>
               <a:t>Get a legal packing of A through E inside ten by eight. Quiz checks the overflow failure and the golden pass. Next: deadspace fifty-seven on this same instance.</a:t>
             </a:r>
           </a:p>
@@ -657,7 +794,13 @@
           <a:lstStyle/>
           <a:p>
             <a:r>
-              <a:t>Modern floorplanning starts with a fixed outline. Ours is ten by eight—area eighty. Modules A through E must pack inside; growing the chip is not allowed.</a:t>
+              <a:t>Fixed-outline legality is two loops in pseudocode: each module must sit inside the outline, and every pair must not have positive-area overlap.</a:t>
+            </a:r>
+          </a:p>
+          <a:p/>
+          <a:p>
+            <a:r>
+              <a:t>Open this module's examples file and find the Pseudocode section. That written sketch is what you implement on the implement track and what the browser challenges measure.</a:t>
             </a:r>
           </a:p>
         </p:txBody>
@@ -727,7 +870,7 @@
           <a:lstStyle/>
           <a:p>
             <a:r>
-              <a:t>The bad seed places E at x equals nine with width two, so it sticks past the right edge. Legality fails immediately—E is outside the outline.</a:t>
+              <a:t>Outline is ten by eight. Golden packing of A through E is legal. Bad seed with E at x nine overflows. Overlap of C and E is the other failure mode.</a:t>
             </a:r>
           </a:p>
         </p:txBody>
@@ -797,7 +940,7 @@
           <a:lstStyle/>
           <a:p>
             <a:r>
-              <a:t>A second failure mode: E sits on top of C. Edge-touching is fine; positive-area interior overlap is not. The checker reports C overlaps E.</a:t>
+              <a:t>Modern floorplanning starts with a fixed outline. Ours is ten by eight—area eighty. Modules A through E must pack inside; growing the chip is not allowed.</a:t>
             </a:r>
           </a:p>
         </p:txBody>
@@ -867,7 +1010,7 @@
           <a:lstStyle/>
           <a:p>
             <a:r>
-              <a:t>The golden packing keeps every block inside ten by eight with no overlaps. A sits at the origin; B, C, and E march right; D stacks above A.</a:t>
+              <a:t>The bad seed places E at x equals nine with width two, so it sticks past the right edge. Legality fails immediately—E is outside the outline.</a:t>
             </a:r>
           </a:p>
         </p:txBody>
@@ -937,13 +1080,7 @@
           <a:lstStyle/>
           <a:p>
             <a:r>
-              <a:t>Never optimize density or wirelength on an illegal packing. Fix containment and overlap first—then the metrics in the next lab mean something.</a:t>
-            </a:r>
-          </a:p>
-          <a:p/>
-          <a:p>
-            <a:r>
-              <a:t>&lt;!-- /algorithm-walkthrough --&gt;</a:t>
+              <a:t>A second failure mode: E sits on top of C. Edge-touching is fine; positive-area interior overlap is not. The checker reports C overlaps E.</a:t>
             </a:r>
           </a:p>
         </p:txBody>
@@ -1013,7 +1150,7 @@
           <a:lstStyle/>
           <a:p>
             <a:r>
-              <a:t>Open the fixed-outline lab. Show the bad seed: E overflows past the right edge. Then show overlap, then golden. Watch legality flip from false to true when the golden packing loads.</a:t>
+              <a:t>The golden packing keeps every block inside ten by eight with no overlaps. A sits at the origin; B, C, and E march right; D stacks above A.</a:t>
             </a:r>
           </a:p>
         </p:txBody>
@@ -1083,7 +1220,7 @@
           <a:lstStyle/>
           <a:p>
             <a:r>
-              <a:t>Parse tiny_modules.json, assign (x, y), and implement containment plus pairwise non-overlap. On the golden packing, legality must pass; on the bad seed with E at nine, it must fail with E outside the outline.</a:t>
+              <a:t>Never optimize density or wirelength on an illegal packing. Fix containment and overlap first—then the metrics in the next lab mean something.</a:t>
             </a:r>
           </a:p>
         </p:txBody>
@@ -1153,7 +1290,7 @@
           <a:lstStyle/>
           <a:p>
             <a:r>
-              <a:t>Off-by-one edges, treating centers as rectangles, and celebrating density on illegal layouts. Edge-touching is allowed; interior overlap is not.</a:t>
+              <a:t>Open the fixed-outline lab. Show the bad seed: E overflows past the right edge. Then show overlap, then golden. Watch legality flip from false to true when the golden packing loads.</a:t>
             </a:r>
           </a:p>
         </p:txBody>
@@ -4311,7 +4448,7 @@
                 </a:solidFill>
                 <a:latin typeface="Calibri"/>
               </a:rPr>
-              <a:t>Your turn</a:t>
+              <a:t>Browser lab track</a:t>
             </a:r>
           </a:p>
         </p:txBody>
@@ -4356,7 +4493,7 @@
                 </a:solidFill>
                 <a:latin typeface="Calibri"/>
               </a:rPr>
-              <a:t>Get a legal packing of A through E inside ten by eight</a:t>
+              <a:t>Open the fixed-outline lab</a:t>
             </a:r>
           </a:p>
           <a:p>
@@ -4378,7 +4515,7 @@
                 </a:solidFill>
                 <a:latin typeface="Calibri"/>
               </a:rPr>
-              <a:t>Quiz checks the overflow failure and the golden pass</a:t>
+              <a:t>Show the bad seed: E overflows past the right edge</a:t>
             </a:r>
           </a:p>
           <a:p>
@@ -4400,7 +4537,29 @@
                 </a:solidFill>
                 <a:latin typeface="Calibri"/>
               </a:rPr>
-              <a:t>Next: deadspace fifty-seven on this same instance</a:t>
+              <a:t>Then show overlap, then golden</a:t>
+            </a:r>
+          </a:p>
+          <a:p>
+            <a:pPr lvl="0" marL="457200" indent="-228600">
+              <a:buFont typeface="Calibri"/>
+              <a:spcAft>
+                <a:spcPts val="1000"/>
+              </a:spcAft>
+              <a:buSzPct val="100000"/>
+              <a:buChar char="•"/>
+              <a:lnSpc>
+                <a:spcPts val="2200"/>
+              </a:lnSpc>
+            </a:pPr>
+            <a:r>
+              <a:rPr sz="2000" b="0">
+                <a:solidFill>
+                  <a:srgbClr val="333333"/>
+                </a:solidFill>
+                <a:latin typeface="Calibri"/>
+              </a:rPr>
+              <a:t>Watch legality flip from false to true when the golden packing loads</a:t>
             </a:r>
           </a:p>
         </p:txBody>
@@ -4452,7 +4611,1164 @@
 </p:sld>
 </file>
 
+<file path=ppt/slides/slide11.xml><?xml version="1.0" encoding="utf-8"?>
+<p:sld xmlns:a="http://schemas.openxmlformats.org/drawingml/2006/main" xmlns:p="http://schemas.openxmlformats.org/presentationml/2006/main" xmlns:r="http://schemas.openxmlformats.org/officeDocument/2006/relationships">
+  <p:cSld>
+    <p:spTree>
+      <p:nvGrpSpPr>
+        <p:cNvPr id="1" name=""/>
+        <p:cNvGrpSpPr/>
+        <p:nvPr/>
+      </p:nvGrpSpPr>
+      <p:grpSpPr/>
+      <p:sp>
+        <p:nvSpPr>
+          <p:cNvPr id="2" name="TextBox 1"/>
+          <p:cNvSpPr txBox="1"/>
+          <p:nvPr/>
+        </p:nvSpPr>
+        <p:spPr>
+          <a:xfrm>
+            <a:off x="548640" y="411480"/>
+            <a:ext cx="11064240" cy="777240"/>
+          </a:xfrm>
+          <a:prstGeom prst="rect">
+            <a:avLst/>
+          </a:prstGeom>
+          <a:noFill/>
+        </p:spPr>
+        <p:txBody>
+          <a:bodyPr wrap="square">
+            <a:noAutofit/>
+          </a:bodyPr>
+          <a:lstStyle/>
+          <a:p>
+            <a:pPr>
+              <a:lnSpc>
+                <a:spcPts val="2200"/>
+              </a:lnSpc>
+            </a:pPr>
+            <a:r>
+              <a:rPr sz="2800" b="1">
+                <a:solidFill>
+                  <a:srgbClr val="1A1A2E"/>
+                </a:solidFill>
+                <a:latin typeface="Calibri"/>
+              </a:rPr>
+              <a:t>Implement track</a:t>
+            </a:r>
+          </a:p>
+        </p:txBody>
+      </p:sp>
+      <p:sp>
+        <p:nvSpPr>
+          <p:cNvPr id="3" name="TextBox 2"/>
+          <p:cNvSpPr txBox="1"/>
+          <p:nvPr/>
+        </p:nvSpPr>
+        <p:spPr>
+          <a:xfrm>
+            <a:off x="548640" y="1234440"/>
+            <a:ext cx="11064240" cy="4937760"/>
+          </a:xfrm>
+          <a:prstGeom prst="rect">
+            <a:avLst/>
+          </a:prstGeom>
+          <a:noFill/>
+        </p:spPr>
+        <p:txBody>
+          <a:bodyPr wrap="square">
+            <a:noAutofit/>
+          </a:bodyPr>
+          <a:lstStyle/>
+          <a:p>
+            <a:pPr lvl="0" marL="457200" indent="-228600">
+              <a:buFont typeface="Calibri"/>
+              <a:spcAft>
+                <a:spcPts val="1000"/>
+              </a:spcAft>
+              <a:buSzPct val="100000"/>
+              <a:buChar char="•"/>
+              <a:lnSpc>
+                <a:spcPts val="2200"/>
+              </a:lnSpc>
+            </a:pPr>
+            <a:r>
+              <a:rPr sz="2000" b="0">
+                <a:solidFill>
+                  <a:srgbClr val="333333"/>
+                </a:solidFill>
+                <a:latin typeface="Calibri"/>
+              </a:rPr>
+              <a:t>Parse tiny_modules.json, assign (x, y)</a:t>
+            </a:r>
+          </a:p>
+          <a:p>
+            <a:pPr lvl="0" marL="457200" indent="-228600">
+              <a:buFont typeface="Calibri"/>
+              <a:spcAft>
+                <a:spcPts val="1000"/>
+              </a:spcAft>
+              <a:buSzPct val="100000"/>
+              <a:buChar char="•"/>
+              <a:lnSpc>
+                <a:spcPts val="2200"/>
+              </a:lnSpc>
+            </a:pPr>
+            <a:r>
+              <a:rPr sz="2000" b="0">
+                <a:solidFill>
+                  <a:srgbClr val="333333"/>
+                </a:solidFill>
+                <a:latin typeface="Calibri"/>
+              </a:rPr>
+              <a:t>On the golden packing, legality must pass</a:t>
+            </a:r>
+          </a:p>
+        </p:txBody>
+      </p:sp>
+      <p:sp>
+        <p:nvSpPr>
+          <p:cNvPr id="4" name="TextBox 3"/>
+          <p:cNvSpPr txBox="1"/>
+          <p:nvPr/>
+        </p:nvSpPr>
+        <p:spPr>
+          <a:xfrm>
+            <a:off x="548640" y="6355080"/>
+            <a:ext cx="11064240" cy="320040"/>
+          </a:xfrm>
+          <a:prstGeom prst="rect">
+            <a:avLst/>
+          </a:prstGeom>
+          <a:noFill/>
+        </p:spPr>
+        <p:txBody>
+          <a:bodyPr wrap="square">
+            <a:noAutofit/>
+          </a:bodyPr>
+          <a:lstStyle/>
+          <a:p>
+            <a:pPr algn="r">
+              <a:lnSpc>
+                <a:spcPts val="2200"/>
+              </a:lnSpc>
+              <a:defRPr sz="1000" b="0">
+                <a:solidFill>
+                  <a:srgbClr val="666666"/>
+                </a:solidFill>
+                <a:latin typeface="Calibri"/>
+              </a:defRPr>
+            </a:pPr>
+            <a:r>
+              <a:t>learn_floorplanning — 01 fixed outline</a:t>
+            </a:r>
+          </a:p>
+        </p:txBody>
+      </p:sp>
+    </p:spTree>
+  </p:cSld>
+  <p:clrMapOvr>
+    <a:masterClrMapping/>
+  </p:clrMapOvr>
+</p:sld>
+</file>
+
+<file path=ppt/slides/slide12.xml><?xml version="1.0" encoding="utf-8"?>
+<p:sld xmlns:a="http://schemas.openxmlformats.org/drawingml/2006/main" xmlns:p="http://schemas.openxmlformats.org/presentationml/2006/main" xmlns:r="http://schemas.openxmlformats.org/officeDocument/2006/relationships">
+  <p:cSld>
+    <p:spTree>
+      <p:nvGrpSpPr>
+        <p:cNvPr id="1" name=""/>
+        <p:cNvGrpSpPr/>
+        <p:nvPr/>
+      </p:nvGrpSpPr>
+      <p:grpSpPr/>
+      <p:sp>
+        <p:nvSpPr>
+          <p:cNvPr id="2" name="TextBox 1"/>
+          <p:cNvSpPr txBox="1"/>
+          <p:nvPr/>
+        </p:nvSpPr>
+        <p:spPr>
+          <a:xfrm>
+            <a:off x="548640" y="411480"/>
+            <a:ext cx="11064240" cy="777240"/>
+          </a:xfrm>
+          <a:prstGeom prst="rect">
+            <a:avLst/>
+          </a:prstGeom>
+          <a:noFill/>
+        </p:spPr>
+        <p:txBody>
+          <a:bodyPr wrap="square">
+            <a:noAutofit/>
+          </a:bodyPr>
+          <a:lstStyle/>
+          <a:p>
+            <a:pPr>
+              <a:lnSpc>
+                <a:spcPts val="2200"/>
+              </a:lnSpc>
+            </a:pPr>
+            <a:r>
+              <a:rPr sz="2800" b="1">
+                <a:solidFill>
+                  <a:srgbClr val="1A1A2E"/>
+                </a:solidFill>
+                <a:latin typeface="Calibri"/>
+              </a:rPr>
+              <a:t>Pitfalls</a:t>
+            </a:r>
+          </a:p>
+        </p:txBody>
+      </p:sp>
+      <p:sp>
+        <p:nvSpPr>
+          <p:cNvPr id="3" name="TextBox 2"/>
+          <p:cNvSpPr txBox="1"/>
+          <p:nvPr/>
+        </p:nvSpPr>
+        <p:spPr>
+          <a:xfrm>
+            <a:off x="548640" y="1234440"/>
+            <a:ext cx="11064240" cy="4937760"/>
+          </a:xfrm>
+          <a:prstGeom prst="rect">
+            <a:avLst/>
+          </a:prstGeom>
+          <a:noFill/>
+        </p:spPr>
+        <p:txBody>
+          <a:bodyPr wrap="square">
+            <a:noAutofit/>
+          </a:bodyPr>
+          <a:lstStyle/>
+          <a:p>
+            <a:pPr lvl="0" marL="457200" indent="-228600">
+              <a:buFont typeface="Calibri"/>
+              <a:spcAft>
+                <a:spcPts val="1000"/>
+              </a:spcAft>
+              <a:buSzPct val="100000"/>
+              <a:buChar char="•"/>
+              <a:lnSpc>
+                <a:spcPts val="2200"/>
+              </a:lnSpc>
+            </a:pPr>
+            <a:r>
+              <a:rPr sz="2000" b="0">
+                <a:solidFill>
+                  <a:srgbClr val="333333"/>
+                </a:solidFill>
+                <a:latin typeface="Calibri"/>
+              </a:rPr>
+              <a:t>Off-by-one edges, treating centers as rectangles</a:t>
+            </a:r>
+          </a:p>
+          <a:p>
+            <a:pPr lvl="0" marL="457200" indent="-228600">
+              <a:buFont typeface="Calibri"/>
+              <a:spcAft>
+                <a:spcPts val="1000"/>
+              </a:spcAft>
+              <a:buSzPct val="100000"/>
+              <a:buChar char="•"/>
+              <a:lnSpc>
+                <a:spcPts val="2200"/>
+              </a:lnSpc>
+            </a:pPr>
+            <a:r>
+              <a:rPr sz="2000" b="0">
+                <a:solidFill>
+                  <a:srgbClr val="333333"/>
+                </a:solidFill>
+                <a:latin typeface="Calibri"/>
+              </a:rPr>
+              <a:t>Edge-touching is allowed; interior overlap is not</a:t>
+            </a:r>
+          </a:p>
+        </p:txBody>
+      </p:sp>
+      <p:sp>
+        <p:nvSpPr>
+          <p:cNvPr id="4" name="TextBox 3"/>
+          <p:cNvSpPr txBox="1"/>
+          <p:nvPr/>
+        </p:nvSpPr>
+        <p:spPr>
+          <a:xfrm>
+            <a:off x="548640" y="6355080"/>
+            <a:ext cx="11064240" cy="320040"/>
+          </a:xfrm>
+          <a:prstGeom prst="rect">
+            <a:avLst/>
+          </a:prstGeom>
+          <a:noFill/>
+        </p:spPr>
+        <p:txBody>
+          <a:bodyPr wrap="square">
+            <a:noAutofit/>
+          </a:bodyPr>
+          <a:lstStyle/>
+          <a:p>
+            <a:pPr algn="r">
+              <a:lnSpc>
+                <a:spcPts val="2200"/>
+              </a:lnSpc>
+              <a:defRPr sz="1000" b="0">
+                <a:solidFill>
+                  <a:srgbClr val="666666"/>
+                </a:solidFill>
+                <a:latin typeface="Calibri"/>
+              </a:defRPr>
+            </a:pPr>
+            <a:r>
+              <a:t>learn_floorplanning — 01 fixed outline</a:t>
+            </a:r>
+          </a:p>
+        </p:txBody>
+      </p:sp>
+    </p:spTree>
+  </p:cSld>
+  <p:clrMapOvr>
+    <a:masterClrMapping/>
+  </p:clrMapOvr>
+</p:sld>
+</file>
+
+<file path=ppt/slides/slide13.xml><?xml version="1.0" encoding="utf-8"?>
+<p:sld xmlns:a="http://schemas.openxmlformats.org/drawingml/2006/main" xmlns:p="http://schemas.openxmlformats.org/presentationml/2006/main" xmlns:r="http://schemas.openxmlformats.org/officeDocument/2006/relationships">
+  <p:cSld>
+    <p:spTree>
+      <p:nvGrpSpPr>
+        <p:cNvPr id="1" name=""/>
+        <p:cNvGrpSpPr/>
+        <p:nvPr/>
+      </p:nvGrpSpPr>
+      <p:grpSpPr/>
+      <p:sp>
+        <p:nvSpPr>
+          <p:cNvPr id="2" name="TextBox 1"/>
+          <p:cNvSpPr txBox="1"/>
+          <p:nvPr/>
+        </p:nvSpPr>
+        <p:spPr>
+          <a:xfrm>
+            <a:off x="548640" y="411480"/>
+            <a:ext cx="11064240" cy="777240"/>
+          </a:xfrm>
+          <a:prstGeom prst="rect">
+            <a:avLst/>
+          </a:prstGeom>
+          <a:noFill/>
+        </p:spPr>
+        <p:txBody>
+          <a:bodyPr wrap="square">
+            <a:noAutofit/>
+          </a:bodyPr>
+          <a:lstStyle/>
+          <a:p>
+            <a:pPr>
+              <a:lnSpc>
+                <a:spcPts val="2200"/>
+              </a:lnSpc>
+            </a:pPr>
+            <a:r>
+              <a:rPr sz="2800" b="1">
+                <a:solidFill>
+                  <a:srgbClr val="1A1A2E"/>
+                </a:solidFill>
+                <a:latin typeface="Calibri"/>
+              </a:rPr>
+              <a:t>Your turn</a:t>
+            </a:r>
+          </a:p>
+        </p:txBody>
+      </p:sp>
+      <p:sp>
+        <p:nvSpPr>
+          <p:cNvPr id="3" name="TextBox 2"/>
+          <p:cNvSpPr txBox="1"/>
+          <p:nvPr/>
+        </p:nvSpPr>
+        <p:spPr>
+          <a:xfrm>
+            <a:off x="548640" y="1234440"/>
+            <a:ext cx="11064240" cy="4937760"/>
+          </a:xfrm>
+          <a:prstGeom prst="rect">
+            <a:avLst/>
+          </a:prstGeom>
+          <a:noFill/>
+        </p:spPr>
+        <p:txBody>
+          <a:bodyPr wrap="square">
+            <a:noAutofit/>
+          </a:bodyPr>
+          <a:lstStyle/>
+          <a:p>
+            <a:pPr lvl="0" marL="457200" indent="-228600">
+              <a:buFont typeface="Calibri"/>
+              <a:spcAft>
+                <a:spcPts val="1000"/>
+              </a:spcAft>
+              <a:buSzPct val="100000"/>
+              <a:buChar char="•"/>
+              <a:lnSpc>
+                <a:spcPts val="2200"/>
+              </a:lnSpc>
+            </a:pPr>
+            <a:r>
+              <a:rPr sz="2000" b="0">
+                <a:solidFill>
+                  <a:srgbClr val="333333"/>
+                </a:solidFill>
+                <a:latin typeface="Calibri"/>
+              </a:rPr>
+              <a:t>Get a legal packing of A through E inside ten by eight</a:t>
+            </a:r>
+          </a:p>
+          <a:p>
+            <a:pPr lvl="0" marL="457200" indent="-228600">
+              <a:buFont typeface="Calibri"/>
+              <a:spcAft>
+                <a:spcPts val="1000"/>
+              </a:spcAft>
+              <a:buSzPct val="100000"/>
+              <a:buChar char="•"/>
+              <a:lnSpc>
+                <a:spcPts val="2200"/>
+              </a:lnSpc>
+            </a:pPr>
+            <a:r>
+              <a:rPr sz="2000" b="0">
+                <a:solidFill>
+                  <a:srgbClr val="333333"/>
+                </a:solidFill>
+                <a:latin typeface="Calibri"/>
+              </a:rPr>
+              <a:t>Quiz checks the overflow failure and the golden pass</a:t>
+            </a:r>
+          </a:p>
+          <a:p>
+            <a:pPr lvl="0" marL="457200" indent="-228600">
+              <a:buFont typeface="Calibri"/>
+              <a:spcAft>
+                <a:spcPts val="1000"/>
+              </a:spcAft>
+              <a:buSzPct val="100000"/>
+              <a:buChar char="•"/>
+              <a:lnSpc>
+                <a:spcPts val="2200"/>
+              </a:lnSpc>
+            </a:pPr>
+            <a:r>
+              <a:rPr sz="2000" b="0">
+                <a:solidFill>
+                  <a:srgbClr val="333333"/>
+                </a:solidFill>
+                <a:latin typeface="Calibri"/>
+              </a:rPr>
+              <a:t>Next: deadspace fifty-seven on this same instance</a:t>
+            </a:r>
+          </a:p>
+        </p:txBody>
+      </p:sp>
+      <p:sp>
+        <p:nvSpPr>
+          <p:cNvPr id="4" name="TextBox 3"/>
+          <p:cNvSpPr txBox="1"/>
+          <p:nvPr/>
+        </p:nvSpPr>
+        <p:spPr>
+          <a:xfrm>
+            <a:off x="548640" y="6355080"/>
+            <a:ext cx="11064240" cy="320040"/>
+          </a:xfrm>
+          <a:prstGeom prst="rect">
+            <a:avLst/>
+          </a:prstGeom>
+          <a:noFill/>
+        </p:spPr>
+        <p:txBody>
+          <a:bodyPr wrap="square">
+            <a:noAutofit/>
+          </a:bodyPr>
+          <a:lstStyle/>
+          <a:p>
+            <a:pPr algn="r">
+              <a:lnSpc>
+                <a:spcPts val="2200"/>
+              </a:lnSpc>
+              <a:defRPr sz="1000" b="0">
+                <a:solidFill>
+                  <a:srgbClr val="666666"/>
+                </a:solidFill>
+                <a:latin typeface="Calibri"/>
+              </a:defRPr>
+            </a:pPr>
+            <a:r>
+              <a:t>learn_floorplanning — 01 fixed outline</a:t>
+            </a:r>
+          </a:p>
+        </p:txBody>
+      </p:sp>
+    </p:spTree>
+  </p:cSld>
+  <p:clrMapOvr>
+    <a:masterClrMapping/>
+  </p:clrMapOvr>
+</p:sld>
+</file>
+
 <file path=ppt/slides/slide2.xml><?xml version="1.0" encoding="utf-8"?>
+<p:sld xmlns:a="http://schemas.openxmlformats.org/drawingml/2006/main" xmlns:p="http://schemas.openxmlformats.org/presentationml/2006/main" xmlns:r="http://schemas.openxmlformats.org/officeDocument/2006/relationships">
+  <p:cSld>
+    <p:spTree>
+      <p:nvGrpSpPr>
+        <p:cNvPr id="1" name=""/>
+        <p:cNvGrpSpPr/>
+        <p:nvPr/>
+      </p:nvGrpSpPr>
+      <p:grpSpPr/>
+      <p:sp>
+        <p:nvSpPr>
+          <p:cNvPr id="2" name="TextBox 1"/>
+          <p:cNvSpPr txBox="1"/>
+          <p:nvPr/>
+        </p:nvSpPr>
+        <p:spPr>
+          <a:xfrm>
+            <a:off x="548640" y="411480"/>
+            <a:ext cx="11064240" cy="777240"/>
+          </a:xfrm>
+          <a:prstGeom prst="rect">
+            <a:avLst/>
+          </a:prstGeom>
+          <a:noFill/>
+        </p:spPr>
+        <p:txBody>
+          <a:bodyPr wrap="square">
+            <a:noAutofit/>
+          </a:bodyPr>
+          <a:lstStyle/>
+          <a:p>
+            <a:pPr>
+              <a:lnSpc>
+                <a:spcPts val="2200"/>
+              </a:lnSpc>
+            </a:pPr>
+            <a:r>
+              <a:rPr sz="2800" b="1">
+                <a:solidFill>
+                  <a:srgbClr val="1A1A2E"/>
+                </a:solidFill>
+                <a:latin typeface="Calibri"/>
+              </a:rPr>
+              <a:t>Pseudocode</a:t>
+            </a:r>
+          </a:p>
+        </p:txBody>
+      </p:sp>
+      <p:sp>
+        <p:nvSpPr>
+          <p:cNvPr id="3" name="TextBox 2"/>
+          <p:cNvSpPr txBox="1"/>
+          <p:nvPr/>
+        </p:nvSpPr>
+        <p:spPr>
+          <a:xfrm>
+            <a:off x="548640" y="1234440"/>
+            <a:ext cx="11064240" cy="4937760"/>
+          </a:xfrm>
+          <a:prstGeom prst="rect">
+            <a:avLst/>
+          </a:prstGeom>
+          <a:noFill/>
+        </p:spPr>
+        <p:txBody>
+          <a:bodyPr wrap="square">
+            <a:noAutofit/>
+          </a:bodyPr>
+          <a:lstStyle/>
+          <a:p>
+            <a:pPr lvl="0" marL="457200" indent="-228600">
+              <a:buFont typeface="Calibri"/>
+              <a:spcAft>
+                <a:spcPts val="1000"/>
+              </a:spcAft>
+              <a:buSzPct val="100000"/>
+              <a:buChar char="•"/>
+              <a:lnSpc>
+                <a:spcPts val="2200"/>
+              </a:lnSpc>
+            </a:pPr>
+            <a:r>
+              <a:rPr sz="2000" b="0">
+                <a:solidFill>
+                  <a:srgbClr val="333333"/>
+                </a:solidFill>
+                <a:latin typeface="Calibri"/>
+              </a:rPr>
+              <a:t>Fixed-outline legality is two loops in pseudocode</a:t>
+            </a:r>
+          </a:p>
+          <a:p>
+            <a:pPr lvl="0" marL="457200" indent="-228600">
+              <a:buFont typeface="Calibri"/>
+              <a:spcAft>
+                <a:spcPts val="1000"/>
+              </a:spcAft>
+              <a:buSzPct val="100000"/>
+              <a:buChar char="•"/>
+              <a:lnSpc>
+                <a:spcPts val="2200"/>
+              </a:lnSpc>
+            </a:pPr>
+            <a:r>
+              <a:rPr sz="2000" b="0">
+                <a:solidFill>
+                  <a:srgbClr val="333333"/>
+                </a:solidFill>
+                <a:latin typeface="Calibri"/>
+              </a:rPr>
+              <a:t>Open this module's examples file and find the Pseudocode section</a:t>
+            </a:r>
+          </a:p>
+          <a:p>
+            <a:pPr lvl="0" marL="457200" indent="-228600">
+              <a:buFont typeface="Calibri"/>
+              <a:spcAft>
+                <a:spcPts val="1000"/>
+              </a:spcAft>
+              <a:buSzPct val="100000"/>
+              <a:buChar char="•"/>
+              <a:lnSpc>
+                <a:spcPts val="2200"/>
+              </a:lnSpc>
+            </a:pPr>
+            <a:r>
+              <a:rPr sz="2000" b="0">
+                <a:solidFill>
+                  <a:srgbClr val="333333"/>
+                </a:solidFill>
+                <a:latin typeface="Calibri"/>
+              </a:rPr>
+              <a:t>That written sketch is what you implement on the implement track and what the browser</a:t>
+            </a:r>
+          </a:p>
+        </p:txBody>
+      </p:sp>
+      <p:sp>
+        <p:nvSpPr>
+          <p:cNvPr id="4" name="TextBox 3"/>
+          <p:cNvSpPr txBox="1"/>
+          <p:nvPr/>
+        </p:nvSpPr>
+        <p:spPr>
+          <a:xfrm>
+            <a:off x="548640" y="6355080"/>
+            <a:ext cx="11064240" cy="320040"/>
+          </a:xfrm>
+          <a:prstGeom prst="rect">
+            <a:avLst/>
+          </a:prstGeom>
+          <a:noFill/>
+        </p:spPr>
+        <p:txBody>
+          <a:bodyPr wrap="square">
+            <a:noAutofit/>
+          </a:bodyPr>
+          <a:lstStyle/>
+          <a:p>
+            <a:pPr algn="r">
+              <a:lnSpc>
+                <a:spcPts val="2200"/>
+              </a:lnSpc>
+              <a:defRPr sz="1000" b="0">
+                <a:solidFill>
+                  <a:srgbClr val="666666"/>
+                </a:solidFill>
+                <a:latin typeface="Calibri"/>
+              </a:defRPr>
+            </a:pPr>
+            <a:r>
+              <a:t>learn_floorplanning — 01 fixed outline</a:t>
+            </a:r>
+          </a:p>
+        </p:txBody>
+      </p:sp>
+    </p:spTree>
+  </p:cSld>
+  <p:clrMapOvr>
+    <a:masterClrMapping/>
+  </p:clrMapOvr>
+</p:sld>
+</file>
+
+<file path=ppt/slides/slide3.xml><?xml version="1.0" encoding="utf-8"?>
+<p:sld xmlns:a="http://schemas.openxmlformats.org/drawingml/2006/main" xmlns:p="http://schemas.openxmlformats.org/presentationml/2006/main" xmlns:r="http://schemas.openxmlformats.org/officeDocument/2006/relationships">
+  <p:cSld>
+    <p:spTree>
+      <p:nvGrpSpPr>
+        <p:cNvPr id="1" name=""/>
+        <p:cNvGrpSpPr/>
+        <p:nvPr/>
+      </p:nvGrpSpPr>
+      <p:grpSpPr/>
+      <p:sp>
+        <p:nvSpPr>
+          <p:cNvPr id="2" name="TextBox 1"/>
+          <p:cNvSpPr txBox="1"/>
+          <p:nvPr/>
+        </p:nvSpPr>
+        <p:spPr>
+          <a:xfrm>
+            <a:off x="548640" y="411480"/>
+            <a:ext cx="11064240" cy="777240"/>
+          </a:xfrm>
+          <a:prstGeom prst="rect">
+            <a:avLst/>
+          </a:prstGeom>
+          <a:noFill/>
+        </p:spPr>
+        <p:txBody>
+          <a:bodyPr wrap="square">
+            <a:noAutofit/>
+          </a:bodyPr>
+          <a:lstStyle/>
+          <a:p>
+            <a:pPr>
+              <a:lnSpc>
+                <a:spcPts val="2200"/>
+              </a:lnSpc>
+            </a:pPr>
+            <a:r>
+              <a:rPr sz="2800" b="1">
+                <a:solidFill>
+                  <a:srgbClr val="1A1A2E"/>
+                </a:solidFill>
+                <a:latin typeface="Calibri"/>
+              </a:rPr>
+              <a:t>Algorithm sketch</a:t>
+            </a:r>
+          </a:p>
+        </p:txBody>
+      </p:sp>
+      <p:sp>
+        <p:nvSpPr>
+          <p:cNvPr id="3" name="TextBox 2"/>
+          <p:cNvSpPr txBox="1"/>
+          <p:nvPr/>
+        </p:nvSpPr>
+        <p:spPr>
+          <a:xfrm>
+            <a:off x="548640" y="1234440"/>
+            <a:ext cx="11064240" cy="4937760"/>
+          </a:xfrm>
+          <a:prstGeom prst="rect">
+            <a:avLst/>
+          </a:prstGeom>
+          <a:noFill/>
+        </p:spPr>
+        <p:txBody>
+          <a:bodyPr wrap="square">
+            <a:noAutofit/>
+          </a:bodyPr>
+          <a:lstStyle/>
+          <a:p>
+            <a:pPr lvl="0" marL="457200" indent="-228600">
+              <a:buFont typeface="Calibri"/>
+              <a:spcAft>
+                <a:spcPts val="1000"/>
+              </a:spcAft>
+              <a:buSzPct val="100000"/>
+              <a:buChar char="•"/>
+              <a:lnSpc>
+                <a:spcPts val="2200"/>
+              </a:lnSpc>
+            </a:pPr>
+            <a:r>
+              <a:rPr sz="2000" b="0">
+                <a:solidFill>
+                  <a:srgbClr val="333333"/>
+                </a:solidFill>
+                <a:latin typeface="Calibri"/>
+              </a:rPr>
+              <a:t>Outline is ten by eight</a:t>
+            </a:r>
+          </a:p>
+          <a:p>
+            <a:pPr lvl="0" marL="457200" indent="-228600">
+              <a:buFont typeface="Calibri"/>
+              <a:spcAft>
+                <a:spcPts val="1000"/>
+              </a:spcAft>
+              <a:buSzPct val="100000"/>
+              <a:buChar char="•"/>
+              <a:lnSpc>
+                <a:spcPts val="2200"/>
+              </a:lnSpc>
+            </a:pPr>
+            <a:r>
+              <a:rPr sz="2000" b="0">
+                <a:solidFill>
+                  <a:srgbClr val="333333"/>
+                </a:solidFill>
+                <a:latin typeface="Calibri"/>
+              </a:rPr>
+              <a:t>Golden packing of A through E is legal</a:t>
+            </a:r>
+          </a:p>
+          <a:p>
+            <a:pPr lvl="0" marL="457200" indent="-228600">
+              <a:buFont typeface="Calibri"/>
+              <a:spcAft>
+                <a:spcPts val="1000"/>
+              </a:spcAft>
+              <a:buSzPct val="100000"/>
+              <a:buChar char="•"/>
+              <a:lnSpc>
+                <a:spcPts val="2200"/>
+              </a:lnSpc>
+            </a:pPr>
+            <a:r>
+              <a:rPr sz="2000" b="0">
+                <a:solidFill>
+                  <a:srgbClr val="333333"/>
+                </a:solidFill>
+                <a:latin typeface="Calibri"/>
+              </a:rPr>
+              <a:t>Bad seed with E at x nine overflows</a:t>
+            </a:r>
+          </a:p>
+          <a:p>
+            <a:pPr lvl="0" marL="457200" indent="-228600">
+              <a:buFont typeface="Calibri"/>
+              <a:spcAft>
+                <a:spcPts val="1000"/>
+              </a:spcAft>
+              <a:buSzPct val="100000"/>
+              <a:buChar char="•"/>
+              <a:lnSpc>
+                <a:spcPts val="2200"/>
+              </a:lnSpc>
+            </a:pPr>
+            <a:r>
+              <a:rPr sz="2000" b="0">
+                <a:solidFill>
+                  <a:srgbClr val="333333"/>
+                </a:solidFill>
+                <a:latin typeface="Calibri"/>
+              </a:rPr>
+              <a:t>Overlap of C and E is the other failure mode</a:t>
+            </a:r>
+          </a:p>
+        </p:txBody>
+      </p:sp>
+      <p:sp>
+        <p:nvSpPr>
+          <p:cNvPr id="4" name="TextBox 3"/>
+          <p:cNvSpPr txBox="1"/>
+          <p:nvPr/>
+        </p:nvSpPr>
+        <p:spPr>
+          <a:xfrm>
+            <a:off x="548640" y="6355080"/>
+            <a:ext cx="11064240" cy="320040"/>
+          </a:xfrm>
+          <a:prstGeom prst="rect">
+            <a:avLst/>
+          </a:prstGeom>
+          <a:noFill/>
+        </p:spPr>
+        <p:txBody>
+          <a:bodyPr wrap="square">
+            <a:noAutofit/>
+          </a:bodyPr>
+          <a:lstStyle/>
+          <a:p>
+            <a:pPr algn="r">
+              <a:lnSpc>
+                <a:spcPts val="2200"/>
+              </a:lnSpc>
+              <a:defRPr sz="1000" b="0">
+                <a:solidFill>
+                  <a:srgbClr val="666666"/>
+                </a:solidFill>
+                <a:latin typeface="Calibri"/>
+              </a:defRPr>
+            </a:pPr>
+            <a:r>
+              <a:t>learn_floorplanning — 01 fixed outline</a:t>
+            </a:r>
+          </a:p>
+        </p:txBody>
+      </p:sp>
+    </p:spTree>
+  </p:cSld>
+  <p:clrMapOvr>
+    <a:masterClrMapping/>
+  </p:clrMapOvr>
+</p:sld>
+</file>
+
+<file path=ppt/slides/slide4.xml><?xml version="1.0" encoding="utf-8"?>
+<p:sld xmlns:a="http://schemas.openxmlformats.org/drawingml/2006/main" xmlns:p="http://schemas.openxmlformats.org/presentationml/2006/main" xmlns:r="http://schemas.openxmlformats.org/officeDocument/2006/relationships">
+  <p:cSld>
+    <p:spTree>
+      <p:nvGrpSpPr>
+        <p:cNvPr id="1" name=""/>
+        <p:cNvGrpSpPr/>
+        <p:nvPr/>
+      </p:nvGrpSpPr>
+      <p:grpSpPr/>
+      <p:sp>
+        <p:nvSpPr>
+          <p:cNvPr id="2" name="TextBox 1"/>
+          <p:cNvSpPr txBox="1"/>
+          <p:nvPr/>
+        </p:nvSpPr>
+        <p:spPr>
+          <a:xfrm>
+            <a:off x="548640" y="411480"/>
+            <a:ext cx="11064240" cy="777240"/>
+          </a:xfrm>
+          <a:prstGeom prst="rect">
+            <a:avLst/>
+          </a:prstGeom>
+          <a:noFill/>
+        </p:spPr>
+        <p:txBody>
+          <a:bodyPr wrap="square">
+            <a:noAutofit/>
+          </a:bodyPr>
+          <a:lstStyle/>
+          <a:p>
+            <a:pPr>
+              <a:lnSpc>
+                <a:spcPts val="2200"/>
+              </a:lnSpc>
+            </a:pPr>
+            <a:r>
+              <a:rPr sz="2800" b="1">
+                <a:solidFill>
+                  <a:srgbClr val="1A1A2E"/>
+                </a:solidFill>
+                <a:latin typeface="Calibri"/>
+              </a:rPr>
+              <a:t>Algorithm sketch — try these</a:t>
+            </a:r>
+          </a:p>
+        </p:txBody>
+      </p:sp>
+      <p:sp>
+        <p:nvSpPr>
+          <p:cNvPr id="3" name="TextBox 2"/>
+          <p:cNvSpPr txBox="1"/>
+          <p:nvPr/>
+        </p:nvSpPr>
+        <p:spPr>
+          <a:xfrm>
+            <a:off x="548640" y="1143000"/>
+            <a:ext cx="11064240" cy="5029200"/>
+          </a:xfrm>
+          <a:prstGeom prst="rect">
+            <a:avLst/>
+          </a:prstGeom>
+          <a:solidFill>
+            <a:srgbClr val="F4F4F4"/>
+          </a:solidFill>
+        </p:spPr>
+        <p:txBody>
+          <a:bodyPr wrap="square">
+            <a:noAutofit/>
+          </a:bodyPr>
+          <a:lstStyle/>
+          <a:p>
+            <a:pPr>
+              <a:lnSpc>
+                <a:spcPts val="2200"/>
+              </a:lnSpc>
+              <a:spcAft>
+                <a:spcPts val="400"/>
+              </a:spcAft>
+            </a:pPr>
+            <a:r>
+              <a:rPr sz="2000" b="0">
+                <a:solidFill>
+                  <a:srgbClr val="333333"/>
+                </a:solidFill>
+                <a:latin typeface="Consolas"/>
+              </a:rPr>
+              <a:t>INPUT: outline W×H, modules (x,y,w,h)</a:t>
+            </a:r>
+          </a:p>
+          <a:p>
+            <a:pPr>
+              <a:lnSpc>
+                <a:spcPts val="2200"/>
+              </a:lnSpc>
+              <a:spcAft>
+                <a:spcPts val="400"/>
+              </a:spcAft>
+            </a:pPr>
+            <a:r>
+              <a:rPr sz="2000" b="0">
+                <a:solidFill>
+                  <a:srgbClr val="333333"/>
+                </a:solidFill>
+                <a:latin typeface="Consolas"/>
+              </a:rPr>
+              <a:t>OUTPUT: legal? / failure reason</a:t>
+            </a:r>
+          </a:p>
+          <a:p>
+            <a:pPr>
+              <a:lnSpc>
+                <a:spcPts val="2200"/>
+              </a:lnSpc>
+              <a:spcAft>
+                <a:spcPts val="400"/>
+              </a:spcAft>
+            </a:pPr>
+            <a:r>
+              <a:rPr sz="2000" b="0">
+                <a:solidFill>
+                  <a:srgbClr val="333333"/>
+                </a:solidFill>
+                <a:latin typeface="Consolas"/>
+              </a:rPr>
+              <a:t>for each m: fail if outside [0,W]×[0,H]</a:t>
+            </a:r>
+          </a:p>
+          <a:p>
+            <a:pPr>
+              <a:lnSpc>
+                <a:spcPts val="2200"/>
+              </a:lnSpc>
+              <a:spcAft>
+                <a:spcPts val="400"/>
+              </a:spcAft>
+            </a:pPr>
+            <a:r>
+              <a:rPr sz="2000" b="0">
+                <a:solidFill>
+                  <a:srgbClr val="333333"/>
+                </a:solidFill>
+                <a:latin typeface="Consolas"/>
+              </a:rPr>
+              <a:t>for each pair: fail if interior overlap</a:t>
+            </a:r>
+          </a:p>
+          <a:p>
+            <a:pPr>
+              <a:lnSpc>
+                <a:spcPts val="2200"/>
+              </a:lnSpc>
+              <a:spcAft>
+                <a:spcPts val="400"/>
+              </a:spcAft>
+            </a:pPr>
+            <a:r>
+              <a:rPr sz="2000" b="0">
+                <a:solidFill>
+                  <a:srgbClr val="333333"/>
+                </a:solidFill>
+                <a:latin typeface="Consolas"/>
+              </a:rPr>
+              <a:t>edge-touch OK; positive-area overlap not</a:t>
+            </a:r>
+          </a:p>
+          <a:p>
+            <a:pPr>
+              <a:lnSpc>
+                <a:spcPts val="2200"/>
+              </a:lnSpc>
+              <a:spcAft>
+                <a:spcPts val="400"/>
+              </a:spcAft>
+            </a:pPr>
+            <a:r>
+              <a:rPr sz="2000" b="0">
+                <a:solidFill>
+                  <a:srgbClr val="333333"/>
+                </a:solidFill>
+                <a:latin typeface="Consolas"/>
+              </a:rPr>
+              <a:t>GOLDEN pack legal; E@x=9 overflow illegal</a:t>
+            </a:r>
+          </a:p>
+          <a:p>
+            <a:pPr>
+              <a:lnSpc>
+                <a:spcPts val="2200"/>
+              </a:lnSpc>
+              <a:spcAft>
+                <a:spcPts val="400"/>
+              </a:spcAft>
+            </a:pPr>
+            <a:r>
+              <a:rPr sz="2000" b="0">
+                <a:solidFill>
+                  <a:srgbClr val="333333"/>
+                </a:solidFill>
+                <a:latin typeface="Consolas"/>
+              </a:rPr>
+              <a:t>outline 10×8 (area 80); modules A–E</a:t>
+            </a:r>
+          </a:p>
+        </p:txBody>
+      </p:sp>
+      <p:sp>
+        <p:nvSpPr>
+          <p:cNvPr id="4" name="TextBox 3"/>
+          <p:cNvSpPr txBox="1"/>
+          <p:nvPr/>
+        </p:nvSpPr>
+        <p:spPr>
+          <a:xfrm>
+            <a:off x="548640" y="6355080"/>
+            <a:ext cx="11064240" cy="320040"/>
+          </a:xfrm>
+          <a:prstGeom prst="rect">
+            <a:avLst/>
+          </a:prstGeom>
+          <a:noFill/>
+        </p:spPr>
+        <p:txBody>
+          <a:bodyPr wrap="square">
+            <a:noAutofit/>
+          </a:bodyPr>
+          <a:lstStyle/>
+          <a:p>
+            <a:pPr algn="r">
+              <a:lnSpc>
+                <a:spcPts val="2200"/>
+              </a:lnSpc>
+              <a:defRPr sz="1000" b="0">
+                <a:solidFill>
+                  <a:srgbClr val="666666"/>
+                </a:solidFill>
+                <a:latin typeface="Calibri"/>
+              </a:defRPr>
+            </a:pPr>
+            <a:r>
+              <a:t>learn_floorplanning — 01 fixed outline</a:t>
+            </a:r>
+          </a:p>
+        </p:txBody>
+      </p:sp>
+    </p:spTree>
+  </p:cSld>
+  <p:clrMapOvr>
+    <a:masterClrMapping/>
+  </p:clrMapOvr>
+</p:sld>
+</file>
+
+<file path=ppt/slides/slide5.xml><?xml version="1.0" encoding="utf-8"?>
 <p:sld xmlns:a="http://schemas.openxmlformats.org/drawingml/2006/main" xmlns:p="http://schemas.openxmlformats.org/presentationml/2006/main" xmlns:r="http://schemas.openxmlformats.org/officeDocument/2006/relationships">
   <p:cSld>
     <p:spTree>
@@ -4611,7 +5927,7 @@
 </p:sld>
 </file>
 
-<file path=ppt/slides/slide3.xml><?xml version="1.0" encoding="utf-8"?>
+<file path=ppt/slides/slide6.xml><?xml version="1.0" encoding="utf-8"?>
 <p:sld xmlns:a="http://schemas.openxmlformats.org/drawingml/2006/main" xmlns:p="http://schemas.openxmlformats.org/presentationml/2006/main" xmlns:r="http://schemas.openxmlformats.org/officeDocument/2006/relationships">
   <p:cSld>
     <p:spTree>
@@ -4770,7 +6086,7 @@
 </p:sld>
 </file>
 
-<file path=ppt/slides/slide4.xml><?xml version="1.0" encoding="utf-8"?>
+<file path=ppt/slides/slide7.xml><?xml version="1.0" encoding="utf-8"?>
 <p:sld xmlns:a="http://schemas.openxmlformats.org/drawingml/2006/main" xmlns:p="http://schemas.openxmlformats.org/presentationml/2006/main" xmlns:r="http://schemas.openxmlformats.org/officeDocument/2006/relationships">
   <p:cSld>
     <p:spTree>
@@ -4929,7 +6245,7 @@
 </p:sld>
 </file>
 
-<file path=ppt/slides/slide5.xml><?xml version="1.0" encoding="utf-8"?>
+<file path=ppt/slides/slide8.xml><?xml version="1.0" encoding="utf-8"?>
 <p:sld xmlns:a="http://schemas.openxmlformats.org/drawingml/2006/main" xmlns:p="http://schemas.openxmlformats.org/presentationml/2006/main" xmlns:r="http://schemas.openxmlformats.org/officeDocument/2006/relationships">
   <p:cSld>
     <p:spTree>
@@ -5088,7 +6404,7 @@
 </p:sld>
 </file>
 
-<file path=ppt/slides/slide6.xml><?xml version="1.0" encoding="utf-8"?>
+<file path=ppt/slides/slide9.xml><?xml version="1.0" encoding="utf-8"?>
 <p:sld xmlns:a="http://schemas.openxmlformats.org/drawingml/2006/main" xmlns:p="http://schemas.openxmlformats.org/presentationml/2006/main" xmlns:r="http://schemas.openxmlformats.org/officeDocument/2006/relationships">
   <p:cSld>
     <p:spTree>
@@ -5203,539 +6519,6 @@
       <p:sp>
         <p:nvSpPr>
           <p:cNvPr id="5" name="TextBox 4"/>
-          <p:cNvSpPr txBox="1"/>
-          <p:nvPr/>
-        </p:nvSpPr>
-        <p:spPr>
-          <a:xfrm>
-            <a:off x="548640" y="6355080"/>
-            <a:ext cx="11064240" cy="320040"/>
-          </a:xfrm>
-          <a:prstGeom prst="rect">
-            <a:avLst/>
-          </a:prstGeom>
-          <a:noFill/>
-        </p:spPr>
-        <p:txBody>
-          <a:bodyPr wrap="square">
-            <a:noAutofit/>
-          </a:bodyPr>
-          <a:lstStyle/>
-          <a:p>
-            <a:pPr algn="r">
-              <a:lnSpc>
-                <a:spcPts val="2200"/>
-              </a:lnSpc>
-              <a:defRPr sz="1000" b="0">
-                <a:solidFill>
-                  <a:srgbClr val="666666"/>
-                </a:solidFill>
-                <a:latin typeface="Calibri"/>
-              </a:defRPr>
-            </a:pPr>
-            <a:r>
-              <a:t>learn_floorplanning — 01 fixed outline</a:t>
-            </a:r>
-          </a:p>
-        </p:txBody>
-      </p:sp>
-    </p:spTree>
-  </p:cSld>
-  <p:clrMapOvr>
-    <a:masterClrMapping/>
-  </p:clrMapOvr>
-</p:sld>
-</file>
-
-<file path=ppt/slides/slide7.xml><?xml version="1.0" encoding="utf-8"?>
-<p:sld xmlns:a="http://schemas.openxmlformats.org/drawingml/2006/main" xmlns:p="http://schemas.openxmlformats.org/presentationml/2006/main" xmlns:r="http://schemas.openxmlformats.org/officeDocument/2006/relationships">
-  <p:cSld>
-    <p:spTree>
-      <p:nvGrpSpPr>
-        <p:cNvPr id="1" name=""/>
-        <p:cNvGrpSpPr/>
-        <p:nvPr/>
-      </p:nvGrpSpPr>
-      <p:grpSpPr/>
-      <p:sp>
-        <p:nvSpPr>
-          <p:cNvPr id="2" name="TextBox 1"/>
-          <p:cNvSpPr txBox="1"/>
-          <p:nvPr/>
-        </p:nvSpPr>
-        <p:spPr>
-          <a:xfrm>
-            <a:off x="548640" y="411480"/>
-            <a:ext cx="11064240" cy="777240"/>
-          </a:xfrm>
-          <a:prstGeom prst="rect">
-            <a:avLst/>
-          </a:prstGeom>
-          <a:noFill/>
-        </p:spPr>
-        <p:txBody>
-          <a:bodyPr wrap="square">
-            <a:noAutofit/>
-          </a:bodyPr>
-          <a:lstStyle/>
-          <a:p>
-            <a:pPr>
-              <a:lnSpc>
-                <a:spcPts val="2200"/>
-              </a:lnSpc>
-            </a:pPr>
-            <a:r>
-              <a:rPr sz="2800" b="1">
-                <a:solidFill>
-                  <a:srgbClr val="1A1A2E"/>
-                </a:solidFill>
-                <a:latin typeface="Calibri"/>
-              </a:rPr>
-              <a:t>Browser lab track</a:t>
-            </a:r>
-          </a:p>
-        </p:txBody>
-      </p:sp>
-      <p:sp>
-        <p:nvSpPr>
-          <p:cNvPr id="3" name="TextBox 2"/>
-          <p:cNvSpPr txBox="1"/>
-          <p:nvPr/>
-        </p:nvSpPr>
-        <p:spPr>
-          <a:xfrm>
-            <a:off x="548640" y="1234440"/>
-            <a:ext cx="11064240" cy="4937760"/>
-          </a:xfrm>
-          <a:prstGeom prst="rect">
-            <a:avLst/>
-          </a:prstGeom>
-          <a:noFill/>
-        </p:spPr>
-        <p:txBody>
-          <a:bodyPr wrap="square">
-            <a:noAutofit/>
-          </a:bodyPr>
-          <a:lstStyle/>
-          <a:p>
-            <a:pPr lvl="0" marL="457200" indent="-228600">
-              <a:buFont typeface="Calibri"/>
-              <a:spcAft>
-                <a:spcPts val="1000"/>
-              </a:spcAft>
-              <a:buSzPct val="100000"/>
-              <a:buChar char="•"/>
-              <a:lnSpc>
-                <a:spcPts val="2200"/>
-              </a:lnSpc>
-            </a:pPr>
-            <a:r>
-              <a:rPr sz="2000" b="0">
-                <a:solidFill>
-                  <a:srgbClr val="333333"/>
-                </a:solidFill>
-                <a:latin typeface="Calibri"/>
-              </a:rPr>
-              <a:t>Open the fixed-outline lab</a:t>
-            </a:r>
-          </a:p>
-          <a:p>
-            <a:pPr lvl="0" marL="457200" indent="-228600">
-              <a:buFont typeface="Calibri"/>
-              <a:spcAft>
-                <a:spcPts val="1000"/>
-              </a:spcAft>
-              <a:buSzPct val="100000"/>
-              <a:buChar char="•"/>
-              <a:lnSpc>
-                <a:spcPts val="2200"/>
-              </a:lnSpc>
-            </a:pPr>
-            <a:r>
-              <a:rPr sz="2000" b="0">
-                <a:solidFill>
-                  <a:srgbClr val="333333"/>
-                </a:solidFill>
-                <a:latin typeface="Calibri"/>
-              </a:rPr>
-              <a:t>Show the bad seed: E overflows past the right edge</a:t>
-            </a:r>
-          </a:p>
-          <a:p>
-            <a:pPr lvl="0" marL="457200" indent="-228600">
-              <a:buFont typeface="Calibri"/>
-              <a:spcAft>
-                <a:spcPts val="1000"/>
-              </a:spcAft>
-              <a:buSzPct val="100000"/>
-              <a:buChar char="•"/>
-              <a:lnSpc>
-                <a:spcPts val="2200"/>
-              </a:lnSpc>
-            </a:pPr>
-            <a:r>
-              <a:rPr sz="2000" b="0">
-                <a:solidFill>
-                  <a:srgbClr val="333333"/>
-                </a:solidFill>
-                <a:latin typeface="Calibri"/>
-              </a:rPr>
-              <a:t>Then show overlap, then golden</a:t>
-            </a:r>
-          </a:p>
-          <a:p>
-            <a:pPr lvl="0" marL="457200" indent="-228600">
-              <a:buFont typeface="Calibri"/>
-              <a:spcAft>
-                <a:spcPts val="1000"/>
-              </a:spcAft>
-              <a:buSzPct val="100000"/>
-              <a:buChar char="•"/>
-              <a:lnSpc>
-                <a:spcPts val="2200"/>
-              </a:lnSpc>
-            </a:pPr>
-            <a:r>
-              <a:rPr sz="2000" b="0">
-                <a:solidFill>
-                  <a:srgbClr val="333333"/>
-                </a:solidFill>
-                <a:latin typeface="Calibri"/>
-              </a:rPr>
-              <a:t>Watch legality flip from false to true when the golden packing loads</a:t>
-            </a:r>
-          </a:p>
-        </p:txBody>
-      </p:sp>
-      <p:sp>
-        <p:nvSpPr>
-          <p:cNvPr id="4" name="TextBox 3"/>
-          <p:cNvSpPr txBox="1"/>
-          <p:nvPr/>
-        </p:nvSpPr>
-        <p:spPr>
-          <a:xfrm>
-            <a:off x="548640" y="6355080"/>
-            <a:ext cx="11064240" cy="320040"/>
-          </a:xfrm>
-          <a:prstGeom prst="rect">
-            <a:avLst/>
-          </a:prstGeom>
-          <a:noFill/>
-        </p:spPr>
-        <p:txBody>
-          <a:bodyPr wrap="square">
-            <a:noAutofit/>
-          </a:bodyPr>
-          <a:lstStyle/>
-          <a:p>
-            <a:pPr algn="r">
-              <a:lnSpc>
-                <a:spcPts val="2200"/>
-              </a:lnSpc>
-              <a:defRPr sz="1000" b="0">
-                <a:solidFill>
-                  <a:srgbClr val="666666"/>
-                </a:solidFill>
-                <a:latin typeface="Calibri"/>
-              </a:defRPr>
-            </a:pPr>
-            <a:r>
-              <a:t>learn_floorplanning — 01 fixed outline</a:t>
-            </a:r>
-          </a:p>
-        </p:txBody>
-      </p:sp>
-    </p:spTree>
-  </p:cSld>
-  <p:clrMapOvr>
-    <a:masterClrMapping/>
-  </p:clrMapOvr>
-</p:sld>
-</file>
-
-<file path=ppt/slides/slide8.xml><?xml version="1.0" encoding="utf-8"?>
-<p:sld xmlns:a="http://schemas.openxmlformats.org/drawingml/2006/main" xmlns:p="http://schemas.openxmlformats.org/presentationml/2006/main" xmlns:r="http://schemas.openxmlformats.org/officeDocument/2006/relationships">
-  <p:cSld>
-    <p:spTree>
-      <p:nvGrpSpPr>
-        <p:cNvPr id="1" name=""/>
-        <p:cNvGrpSpPr/>
-        <p:nvPr/>
-      </p:nvGrpSpPr>
-      <p:grpSpPr/>
-      <p:sp>
-        <p:nvSpPr>
-          <p:cNvPr id="2" name="TextBox 1"/>
-          <p:cNvSpPr txBox="1"/>
-          <p:nvPr/>
-        </p:nvSpPr>
-        <p:spPr>
-          <a:xfrm>
-            <a:off x="548640" y="411480"/>
-            <a:ext cx="11064240" cy="777240"/>
-          </a:xfrm>
-          <a:prstGeom prst="rect">
-            <a:avLst/>
-          </a:prstGeom>
-          <a:noFill/>
-        </p:spPr>
-        <p:txBody>
-          <a:bodyPr wrap="square">
-            <a:noAutofit/>
-          </a:bodyPr>
-          <a:lstStyle/>
-          <a:p>
-            <a:pPr>
-              <a:lnSpc>
-                <a:spcPts val="2200"/>
-              </a:lnSpc>
-            </a:pPr>
-            <a:r>
-              <a:rPr sz="2800" b="1">
-                <a:solidFill>
-                  <a:srgbClr val="1A1A2E"/>
-                </a:solidFill>
-                <a:latin typeface="Calibri"/>
-              </a:rPr>
-              <a:t>Implement track</a:t>
-            </a:r>
-          </a:p>
-        </p:txBody>
-      </p:sp>
-      <p:sp>
-        <p:nvSpPr>
-          <p:cNvPr id="3" name="TextBox 2"/>
-          <p:cNvSpPr txBox="1"/>
-          <p:nvPr/>
-        </p:nvSpPr>
-        <p:spPr>
-          <a:xfrm>
-            <a:off x="548640" y="1234440"/>
-            <a:ext cx="11064240" cy="4937760"/>
-          </a:xfrm>
-          <a:prstGeom prst="rect">
-            <a:avLst/>
-          </a:prstGeom>
-          <a:noFill/>
-        </p:spPr>
-        <p:txBody>
-          <a:bodyPr wrap="square">
-            <a:noAutofit/>
-          </a:bodyPr>
-          <a:lstStyle/>
-          <a:p>
-            <a:pPr lvl="0" marL="457200" indent="-228600">
-              <a:buFont typeface="Calibri"/>
-              <a:spcAft>
-                <a:spcPts val="1000"/>
-              </a:spcAft>
-              <a:buSzPct val="100000"/>
-              <a:buChar char="•"/>
-              <a:lnSpc>
-                <a:spcPts val="2200"/>
-              </a:lnSpc>
-            </a:pPr>
-            <a:r>
-              <a:rPr sz="2000" b="0">
-                <a:solidFill>
-                  <a:srgbClr val="333333"/>
-                </a:solidFill>
-                <a:latin typeface="Calibri"/>
-              </a:rPr>
-              <a:t>Parse tiny_modules.json, assign (x, y)</a:t>
-            </a:r>
-          </a:p>
-          <a:p>
-            <a:pPr lvl="0" marL="457200" indent="-228600">
-              <a:buFont typeface="Calibri"/>
-              <a:spcAft>
-                <a:spcPts val="1000"/>
-              </a:spcAft>
-              <a:buSzPct val="100000"/>
-              <a:buChar char="•"/>
-              <a:lnSpc>
-                <a:spcPts val="2200"/>
-              </a:lnSpc>
-            </a:pPr>
-            <a:r>
-              <a:rPr sz="2000" b="0">
-                <a:solidFill>
-                  <a:srgbClr val="333333"/>
-                </a:solidFill>
-                <a:latin typeface="Calibri"/>
-              </a:rPr>
-              <a:t>On the golden packing, legality must pass</a:t>
-            </a:r>
-          </a:p>
-        </p:txBody>
-      </p:sp>
-      <p:sp>
-        <p:nvSpPr>
-          <p:cNvPr id="4" name="TextBox 3"/>
-          <p:cNvSpPr txBox="1"/>
-          <p:nvPr/>
-        </p:nvSpPr>
-        <p:spPr>
-          <a:xfrm>
-            <a:off x="548640" y="6355080"/>
-            <a:ext cx="11064240" cy="320040"/>
-          </a:xfrm>
-          <a:prstGeom prst="rect">
-            <a:avLst/>
-          </a:prstGeom>
-          <a:noFill/>
-        </p:spPr>
-        <p:txBody>
-          <a:bodyPr wrap="square">
-            <a:noAutofit/>
-          </a:bodyPr>
-          <a:lstStyle/>
-          <a:p>
-            <a:pPr algn="r">
-              <a:lnSpc>
-                <a:spcPts val="2200"/>
-              </a:lnSpc>
-              <a:defRPr sz="1000" b="0">
-                <a:solidFill>
-                  <a:srgbClr val="666666"/>
-                </a:solidFill>
-                <a:latin typeface="Calibri"/>
-              </a:defRPr>
-            </a:pPr>
-            <a:r>
-              <a:t>learn_floorplanning — 01 fixed outline</a:t>
-            </a:r>
-          </a:p>
-        </p:txBody>
-      </p:sp>
-    </p:spTree>
-  </p:cSld>
-  <p:clrMapOvr>
-    <a:masterClrMapping/>
-  </p:clrMapOvr>
-</p:sld>
-</file>
-
-<file path=ppt/slides/slide9.xml><?xml version="1.0" encoding="utf-8"?>
-<p:sld xmlns:a="http://schemas.openxmlformats.org/drawingml/2006/main" xmlns:p="http://schemas.openxmlformats.org/presentationml/2006/main" xmlns:r="http://schemas.openxmlformats.org/officeDocument/2006/relationships">
-  <p:cSld>
-    <p:spTree>
-      <p:nvGrpSpPr>
-        <p:cNvPr id="1" name=""/>
-        <p:cNvGrpSpPr/>
-        <p:nvPr/>
-      </p:nvGrpSpPr>
-      <p:grpSpPr/>
-      <p:sp>
-        <p:nvSpPr>
-          <p:cNvPr id="2" name="TextBox 1"/>
-          <p:cNvSpPr txBox="1"/>
-          <p:nvPr/>
-        </p:nvSpPr>
-        <p:spPr>
-          <a:xfrm>
-            <a:off x="548640" y="411480"/>
-            <a:ext cx="11064240" cy="777240"/>
-          </a:xfrm>
-          <a:prstGeom prst="rect">
-            <a:avLst/>
-          </a:prstGeom>
-          <a:noFill/>
-        </p:spPr>
-        <p:txBody>
-          <a:bodyPr wrap="square">
-            <a:noAutofit/>
-          </a:bodyPr>
-          <a:lstStyle/>
-          <a:p>
-            <a:pPr>
-              <a:lnSpc>
-                <a:spcPts val="2200"/>
-              </a:lnSpc>
-            </a:pPr>
-            <a:r>
-              <a:rPr sz="2800" b="1">
-                <a:solidFill>
-                  <a:srgbClr val="1A1A2E"/>
-                </a:solidFill>
-                <a:latin typeface="Calibri"/>
-              </a:rPr>
-              <a:t>Pitfalls</a:t>
-            </a:r>
-          </a:p>
-        </p:txBody>
-      </p:sp>
-      <p:sp>
-        <p:nvSpPr>
-          <p:cNvPr id="3" name="TextBox 2"/>
-          <p:cNvSpPr txBox="1"/>
-          <p:nvPr/>
-        </p:nvSpPr>
-        <p:spPr>
-          <a:xfrm>
-            <a:off x="548640" y="1234440"/>
-            <a:ext cx="11064240" cy="4937760"/>
-          </a:xfrm>
-          <a:prstGeom prst="rect">
-            <a:avLst/>
-          </a:prstGeom>
-          <a:noFill/>
-        </p:spPr>
-        <p:txBody>
-          <a:bodyPr wrap="square">
-            <a:noAutofit/>
-          </a:bodyPr>
-          <a:lstStyle/>
-          <a:p>
-            <a:pPr lvl="0" marL="457200" indent="-228600">
-              <a:buFont typeface="Calibri"/>
-              <a:spcAft>
-                <a:spcPts val="1000"/>
-              </a:spcAft>
-              <a:buSzPct val="100000"/>
-              <a:buChar char="•"/>
-              <a:lnSpc>
-                <a:spcPts val="2200"/>
-              </a:lnSpc>
-            </a:pPr>
-            <a:r>
-              <a:rPr sz="2000" b="0">
-                <a:solidFill>
-                  <a:srgbClr val="333333"/>
-                </a:solidFill>
-                <a:latin typeface="Calibri"/>
-              </a:rPr>
-              <a:t>Off-by-one edges, treating centers as rectangles</a:t>
-            </a:r>
-          </a:p>
-          <a:p>
-            <a:pPr lvl="0" marL="457200" indent="-228600">
-              <a:buFont typeface="Calibri"/>
-              <a:spcAft>
-                <a:spcPts val="1000"/>
-              </a:spcAft>
-              <a:buSzPct val="100000"/>
-              <a:buChar char="•"/>
-              <a:lnSpc>
-                <a:spcPts val="2200"/>
-              </a:lnSpc>
-            </a:pPr>
-            <a:r>
-              <a:rPr sz="2000" b="0">
-                <a:solidFill>
-                  <a:srgbClr val="333333"/>
-                </a:solidFill>
-                <a:latin typeface="Calibri"/>
-              </a:rPr>
-              <a:t>Edge-touching is allowed; interior overlap is not</a:t>
-            </a:r>
-          </a:p>
-        </p:txBody>
-      </p:sp>
-      <p:sp>
-        <p:nvSpPr>
-          <p:cNvPr id="4" name="TextBox 3"/>
           <p:cNvSpPr txBox="1"/>
           <p:nvPr/>
         </p:nvSpPr>
